--- a/07_report/外墙缺陷智能筛查_答辩PPT.pptx
+++ b/07_report/外墙缺陷智能筛查_答辩PPT.pptx
@@ -5934,7 +5934,7 @@
               </a:defRPr>
             </a:pPr>
             <a:r>
-              <a:t>③ 部署优化（实测证据）</a:t>
+              <a:t>③ 部署优化（实测证据，技术报告 §8.2.2）</a:t>
             </a:r>
           </a:p>
           <a:p>
@@ -5950,7 +5950,7 @@
               </a:defRPr>
             </a:pPr>
             <a:r>
-              <a:t>FP32 ONNX 36.14 → FP16 18.13 MB（−49.8%）；25 张图检测框 146:146、IoU 0.9967</a:t>
+              <a:t>模型转换链：FP32 ONNX 36.18 → FP16 18.14 MB（−49.9%）→ ★ INT8 9.72 MB（−73.1%）</a:t>
             </a:r>
           </a:p>
           <a:p>
@@ -5966,7 +5966,55 @@
               </a:defRPr>
             </a:pPr>
             <a:r>
-              <a:t>批量推理 batch=8 吞吐 1.95×；INT8 四档端到端检出为 0 —— 如实归档不包装</a:t>
+              <a:t>INT8 关键做法：保留 Detect 头为 FP32，只量化主干 —— 全量量化会检出 0，混合量化可用</a:t>
+            </a:r>
+          </a:p>
+          <a:p>
+            <a:pPr lvl="1">
+              <a:spcAft>
+                <a:spcPts val="400"/>
+              </a:spcAft>
+              <a:defRPr sz="1600" b="0">
+                <a:solidFill>
+                  <a:srgbClr val="182030"/>
+                </a:solidFill>
+                <a:latin typeface="微软雅黑"/>
+              </a:defRPr>
+            </a:pPr>
+            <a:r>
+              <a:t>精度：mAP50 0.7109（FP32 ONNX 0.7178，Δ −0.0069 在噪声内）；7 类逐类无崩塌</a:t>
+            </a:r>
+          </a:p>
+          <a:p>
+            <a:pPr lvl="1">
+              <a:spcAft>
+                <a:spcPts val="400"/>
+              </a:spcAft>
+              <a:defRPr sz="1600" b="0">
+                <a:solidFill>
+                  <a:srgbClr val="182030"/>
+                </a:solidFill>
+                <a:latin typeface="微软雅黑"/>
+              </a:defRPr>
+            </a:pPr>
+            <a:r>
+              <a:t>FP16 一致性 25 张图框数 146:146、IoU 0.9967；批量推理 batch=8 吞吐 1.95×</a:t>
+            </a:r>
+          </a:p>
+          <a:p>
+            <a:pPr lvl="1">
+              <a:spcAft>
+                <a:spcPts val="400"/>
+              </a:spcAft>
+              <a:defRPr sz="1600" b="0">
+                <a:solidFill>
+                  <a:srgbClr val="182030"/>
+                </a:solidFill>
+                <a:latin typeface="微软雅黑"/>
+              </a:defRPr>
+            </a:pPr>
+            <a:r>
+              <a:t>★ 口径：体积压进 10 MB 门槛；INT8 延迟未测、校准集仅 32 张（本机内存限制）</a:t>
             </a:r>
           </a:p>
           <a:p>

--- a/07_report/外墙缺陷智能筛查_答辩PPT.pptx
+++ b/07_report/外墙缺陷智能筛查_答辩PPT.pptx
@@ -6158,7 +6158,7 @@
               </a:defRPr>
             </a:pPr>
             <a:r>
-              <a:t>开源（计划）：GitHub 代码 + 数据构建脚本（不含数据集，附各来源许可）</a:t>
+              <a:t>★ 已开源：GitHub 公开仓库（https://github.com/dutanlu/-），215 文件 / 2.53 MB，MIT 许可；数据集与权重按许可不上传，只提供构建脚本</a:t>
             </a:r>
           </a:p>
         </p:txBody>

--- a/07_report/外墙缺陷智能筛查_答辩PPT.pptx
+++ b/07_report/外墙缺陷智能筛查_答辩PPT.pptx
@@ -5767,7 +5767,7 @@
               </a:defRPr>
             </a:pPr>
             <a:r>
-              <a:t>技术深度：损失函数优化 · 判据定量刻画 · 成像维度 · 部署优化 · 开源（均可复算）</a:t>
+              <a:t>技术深度：学习式弃权 · 长尾对照 · 损失函数优化 · 判据定量刻画 · 成像维度 · 部署优化 · 开源（均可复算）</a:t>
             </a:r>
           </a:p>
         </p:txBody>
@@ -6158,7 +6158,151 @@
               </a:defRPr>
             </a:pPr>
             <a:r>
-              <a:t>★ 已开源：GitHub 公开仓库（https://github.com/dutanlu/-），215 文件 / 2.53 MB，MIT 许可；数据集与权重按许可不上传，只提供构建脚本</a:t>
+              <a:t>⑥ 拒答判据的学习式替代：四路对决（技术报告 §7.11）</a:t>
+            </a:r>
+          </a:p>
+          <a:p>
+            <a:pPr lvl="1">
+              <a:spcAft>
+                <a:spcPts val="400"/>
+              </a:spcAft>
+              <a:defRPr sz="1600" b="0">
+                <a:solidFill>
+                  <a:srgbClr val="182030"/>
+                </a:solidFill>
+                <a:latin typeface="微软雅黑"/>
+              </a:defRPr>
+            </a:pPr>
+            <a:r>
+              <a:t>285 测试图 → 1235 可监督实例（正 138）；特征剔除全部 F1 列防泄漏</a:t>
+            </a:r>
+          </a:p>
+          <a:p>
+            <a:pPr lvl="1">
+              <a:spcAft>
+                <a:spcPts val="400"/>
+              </a:spcAft>
+              <a:defRPr sz="1600" b="0">
+                <a:solidFill>
+                  <a:srgbClr val="182030"/>
+                </a:solidFill>
+                <a:latin typeface="微软雅黑"/>
+              </a:defRPr>
+            </a:pPr>
+            <a:r>
+              <a:t>实测 AUROC：学习式 GBDT 0.7996 ＞ 手写几何 0.5426（Δ +0.2570）＞ 纯 softmax 0.5786（Δ +0.2210）</a:t>
+            </a:r>
+          </a:p>
+          <a:p>
+            <a:pPr lvl="1">
+              <a:spcAft>
+                <a:spcPts val="400"/>
+              </a:spcAft>
+              <a:defRPr sz="1600" b="0">
+                <a:solidFill>
+                  <a:srgbClr val="182030"/>
+                </a:solidFill>
+                <a:latin typeface="微软雅黑"/>
+              </a:defRPr>
+            </a:pPr>
+            <a:r>
+              <a:t>⇒ 证实「几何/多尺度信号含 softmax 之外的独立判别信息」（GBDT 重要度里 conf 仅排第 4）</a:t>
+            </a:r>
+          </a:p>
+          <a:p>
+            <a:pPr lvl="1">
+              <a:spcAft>
+                <a:spcPts val="400"/>
+              </a:spcAft>
+              <a:defRPr sz="1600" b="0">
+                <a:solidFill>
+                  <a:srgbClr val="182030"/>
+                </a:solidFill>
+                <a:latin typeface="微软雅黑"/>
+              </a:defRPr>
+            </a:pPr>
+            <a:r>
+              <a:t>★ 预注册判据先写死、后验证：全部通过且余量很大（阈值 0.02 / 0.03）</a:t>
+            </a:r>
+          </a:p>
+          <a:p>
+            <a:pPr>
+              <a:spcAft>
+                <a:spcPts val="800"/>
+              </a:spcAft>
+              <a:defRPr sz="1600" b="1">
+                <a:solidFill>
+                  <a:srgbClr val="182030"/>
+                </a:solidFill>
+                <a:latin typeface="微软雅黑"/>
+              </a:defRPr>
+            </a:pPr>
+            <a:r>
+              <a:t>⑦ 长尾的第二层干预：训练集降采样对照（技术报告 §7.10）</a:t>
+            </a:r>
+          </a:p>
+          <a:p>
+            <a:pPr lvl="1">
+              <a:spcAft>
+                <a:spcPts val="400"/>
+              </a:spcAft>
+              <a:defRPr sz="1600" b="0">
+                <a:solidFill>
+                  <a:srgbClr val="182030"/>
+                </a:solidFill>
+                <a:latin typeface="微软雅黑"/>
+              </a:defRPr>
+            </a:pPr>
+            <a:r>
+              <a:t>rust 9433→3078→977（两档）；test 评估 mAP50 0.7230 / 0.7231 / 0.7099</a:t>
+            </a:r>
+          </a:p>
+          <a:p>
+            <a:pPr lvl="1">
+              <a:spcAft>
+                <a:spcPts val="400"/>
+              </a:spcAft>
+              <a:defRPr sz="1600" b="0">
+                <a:solidFill>
+                  <a:srgbClr val="182030"/>
+                </a:solidFill>
+                <a:latin typeface="微软雅黑"/>
+              </a:defRPr>
+            </a:pPr>
+            <a:r>
+              <a:t>★ 诚实结论：降采样**未**救回稀有类（宏平均 +0.0000 / −0.0130；仅 rust 自身显著下降）</a:t>
+            </a:r>
+          </a:p>
+          <a:p>
+            <a:pPr lvl="1">
+              <a:spcAft>
+                <a:spcPts val="400"/>
+              </a:spcAft>
+              <a:defRPr sz="1600" b="0">
+                <a:solidFill>
+                  <a:srgbClr val="182030"/>
+                </a:solidFill>
+                <a:latin typeface="微软雅黑"/>
+              </a:defRPr>
+            </a:pPr>
+            <a:r>
+              <a:t>⇒ 与⑤损失层加权共同证否「rust 长尾 = 训练不平衡」——两种干预都无效，瓶颈在识别本身</a:t>
+            </a:r>
+          </a:p>
+          <a:p>
+            <a:pPr>
+              <a:spcAft>
+                <a:spcPts val="800"/>
+              </a:spcAft>
+              <a:defRPr sz="1600" b="1">
+                <a:solidFill>
+                  <a:srgbClr val="182030"/>
+                </a:solidFill>
+                <a:latin typeface="微软雅黑"/>
+              </a:defRPr>
+            </a:pPr>
+            <a:r>
+              <a:t>★ 已开源：GitHub 公开仓库 https://github.com/dutanlu/wall-defect-screening ，259 文件 / 2.84 MB，MIT 许可；数据集与权重按许可不上传，只提供构建脚本</a:t>
             </a:r>
           </a:p>
         </p:txBody>

--- a/07_report/外墙缺陷智能筛查_答辩PPT.pptx
+++ b/07_report/外墙缺陷智能筛查_答辩PPT.pptx
@@ -24,6 +24,9 @@
     <p:sldId id="272" r:id="rId23"/>
     <p:sldId id="273" r:id="rId24"/>
     <p:sldId id="274" r:id="rId25"/>
+    <p:sldId id="276" r:id="rId27"/>
+    <p:sldId id="277" r:id="rId28"/>
+    <p:sldId id="278" r:id="rId29"/>
     <p:sldId id="275" r:id="rId26"/>
   </p:sldIdLst>
   <p:sldSz cx="9144000" cy="6858000" type="screen4x3"/>
@@ -8343,6 +8346,355 @@
 <file path=ppt/slides/slide20.xml><?xml version="1.0" encoding="utf-8"?>
 <p:sld xmlns:a="http://schemas.openxmlformats.org/drawingml/2006/main" xmlns:p="http://schemas.openxmlformats.org/presentationml/2006/main" xmlns:r="http://schemas.openxmlformats.org/officeDocument/2006/relationships">
   <p:cSld>
+    <p:spTree>
+      <p:nvGrpSpPr>
+        <p:cNvPr id="1" name=""/>
+        <p:cNvGrpSpPr/>
+        <p:nvPr/>
+      </p:nvGrpSpPr>
+      <p:grpSpPr/>
+      <p:sp>
+        <p:nvSpPr>
+          <p:cNvPr id="2" name="Rectangle 1"/>
+          <p:cNvSpPr/>
+          <p:nvPr/>
+        </p:nvSpPr>
+        <p:spPr>
+          <a:xfrm>
+            <a:off x="0" y="0"/>
+            <a:ext cx="9144000" cy="1005840"/>
+          </a:xfrm>
+          <a:prstGeom prst="rect">
+            <a:avLst/>
+          </a:prstGeom>
+          <a:solidFill>
+            <a:srgbClr val="2563EB"/>
+          </a:solidFill>
+          <a:ln>
+            <a:noFill/>
+          </a:ln>
+        </p:spPr>
+        <p:style>
+          <a:lnRef idx="1">
+            <a:schemeClr val="accent1"/>
+          </a:lnRef>
+          <a:fillRef idx="3">
+            <a:schemeClr val="accent1"/>
+          </a:fillRef>
+          <a:effectRef idx="2">
+            <a:schemeClr val="accent1"/>
+          </a:effectRef>
+          <a:fontRef idx="minor">
+            <a:schemeClr val="lt1"/>
+          </a:fontRef>
+        </p:style>
+        <p:txBody>
+          <a:bodyPr rtlCol="0" anchor="ctr"/>
+          <a:lstStyle/>
+          <a:p>
+            <a:pPr algn="ctr"/>
+          </a:p>
+        </p:txBody>
+      </p:sp>
+      <p:sp>
+        <p:nvSpPr>
+          <p:cNvPr id="3" name="Rectangle 2"/>
+          <p:cNvSpPr/>
+          <p:nvPr/>
+        </p:nvSpPr>
+        <p:spPr>
+          <a:xfrm>
+            <a:off x="274320" y="228600"/>
+            <a:ext cx="548640" cy="548640"/>
+          </a:xfrm>
+          <a:prstGeom prst="rect">
+            <a:avLst/>
+          </a:prstGeom>
+          <a:solidFill>
+            <a:srgbClr val="7C3AED"/>
+          </a:solidFill>
+          <a:ln>
+            <a:noFill/>
+          </a:ln>
+        </p:spPr>
+        <p:style>
+          <a:lnRef idx="1">
+            <a:schemeClr val="accent1"/>
+          </a:lnRef>
+          <a:fillRef idx="3">
+            <a:schemeClr val="accent1"/>
+          </a:fillRef>
+          <a:effectRef idx="2">
+            <a:schemeClr val="accent1"/>
+          </a:effectRef>
+          <a:fontRef idx="minor">
+            <a:schemeClr val="lt1"/>
+          </a:fontRef>
+        </p:style>
+        <p:txBody>
+          <a:bodyPr rtlCol="0" anchor="ctr"/>
+          <a:lstStyle/>
+          <a:p>
+            <a:pPr algn="ctr">
+              <a:defRPr sz="2000" b="1">
+                <a:solidFill>
+                  <a:srgbClr val="FFFFFF"/>
+                </a:solidFill>
+                <a:latin typeface="微软雅黑"/>
+              </a:defRPr>
+            </a:pPr>
+            <a:r>
+              <a:t>05</a:t>
+            </a:r>
+          </a:p>
+        </p:txBody>
+      </p:sp>
+      <p:sp>
+        <p:nvSpPr>
+          <p:cNvPr id="4" name="TextBox 3"/>
+          <p:cNvSpPr txBox="1"/>
+          <p:nvPr/>
+        </p:nvSpPr>
+        <p:spPr>
+          <a:xfrm>
+            <a:off x="1097280" y="91440"/>
+            <a:ext cx="7498080" cy="822960"/>
+          </a:xfrm>
+          <a:prstGeom prst="rect">
+            <a:avLst/>
+          </a:prstGeom>
+          <a:noFill/>
+        </p:spPr>
+        <p:txBody>
+          <a:bodyPr wrap="square">
+            <a:spAutoFit/>
+          </a:bodyPr>
+          <a:lstStyle/>
+          <a:p>
+            <a:pPr algn="l">
+              <a:defRPr sz="2400" b="1">
+                <a:solidFill>
+                  <a:srgbClr val="FFFFFF"/>
+                </a:solidFill>
+                <a:latin typeface="微软雅黑"/>
+              </a:defRPr>
+            </a:pPr>
+            <a:r>
+              <a:t>工程过程实录：开发环境崩溃与自愈</a:t>
+            </a:r>
+          </a:p>
+        </p:txBody>
+      </p:sp>
+      <p:sp>
+        <p:nvSpPr>
+          <p:cNvPr id="5" name="TextBox 4"/>
+          <p:cNvSpPr txBox="1"/>
+          <p:nvPr/>
+        </p:nvSpPr>
+        <p:spPr>
+          <a:xfrm>
+            <a:off x="731520" y="1234440"/>
+            <a:ext cx="7680960" cy="5029200"/>
+          </a:xfrm>
+          <a:prstGeom prst="rect">
+            <a:avLst/>
+          </a:prstGeom>
+          <a:noFill/>
+        </p:spPr>
+        <p:txBody>
+          <a:bodyPr wrap="square">
+            <a:spAutoFit/>
+          </a:bodyPr>
+          <a:lstStyle/>
+          <a:p>
+            <a:pPr>
+              <a:spcAft>
+                <a:spcPts val="800"/>
+              </a:spcAft>
+              <a:defRPr sz="1600" b="1">
+                <a:solidFill>
+                  <a:srgbClr val="182030"/>
+                </a:solidFill>
+                <a:latin typeface="微软雅黑"/>
+              </a:defRPr>
+            </a:pPr>
+            <a:r>
+              <a:t>现象：交付期内页面崩溃 27 次，其中 13 次为内存耗尽（OOM）</a:t>
+            </a:r>
+          </a:p>
+          <a:p>
+            <a:pPr lvl="1">
+              <a:spcAft>
+                <a:spcPts val="400"/>
+              </a:spcAft>
+              <a:defRPr sz="1600" b="0">
+                <a:solidFill>
+                  <a:srgbClr val="182030"/>
+                </a:solidFill>
+                <a:latin typeface="微软雅黑"/>
+              </a:defRPr>
+            </a:pPr>
+            <a:r>
+              <a:t>单日最高 2026-09-25：11 次；22:44 那次把主进程一起拖重启</a:t>
+            </a:r>
+          </a:p>
+          <a:p>
+            <a:pPr lvl="1">
+              <a:spcAft>
+                <a:spcPts val="400"/>
+              </a:spcAft>
+              <a:defRPr sz="1600" b="0">
+                <a:solidFill>
+                  <a:srgbClr val="182030"/>
+                </a:solidFill>
+                <a:latin typeface="微软雅黑"/>
+              </a:defRPr>
+            </a:pPr>
+            <a:r>
+              <a:t>并连带杀死了正在训练的第 70/100 轮 —— 日志无报错，属静默死亡</a:t>
+            </a:r>
+          </a:p>
+          <a:p>
+            <a:pPr>
+              <a:spcAft>
+                <a:spcPts val="800"/>
+              </a:spcAft>
+              <a:defRPr sz="1600" b="1">
+                <a:solidFill>
+                  <a:srgbClr val="182030"/>
+                </a:solidFill>
+                <a:latin typeface="微软雅黑"/>
+              </a:defRPr>
+            </a:pPr>
+            <a:r>
+              <a:t>根因：内存被三处同时吃满 —— 环境容量问题，不是代码缺陷</a:t>
+            </a:r>
+          </a:p>
+          <a:p>
+            <a:pPr lvl="1">
+              <a:spcAft>
+                <a:spcPts val="400"/>
+              </a:spcAft>
+              <a:defRPr sz="1600" b="0">
+                <a:solidFill>
+                  <a:srgbClr val="182030"/>
+                </a:solidFill>
+                <a:latin typeface="微软雅黑"/>
+              </a:defRPr>
+            </a:pPr>
+            <a:r>
+              <a:t>超长会话使渲染进程自身膨胀到 1.7 GB、CPU 96%（实测曲线）</a:t>
+            </a:r>
+          </a:p>
+          <a:p>
+            <a:pPr lvl="1">
+              <a:spcAft>
+                <a:spcPts val="400"/>
+              </a:spcAft>
+              <a:defRPr sz="1600" b="0">
+                <a:solidFill>
+                  <a:srgbClr val="182030"/>
+                </a:solidFill>
+                <a:latin typeface="微软雅黑"/>
+              </a:defRPr>
+            </a:pPr>
+            <a:r>
+              <a:t>并发模型训练把系统可用内存压到不足 1 GB（本机总内存 16 GB）</a:t>
+            </a:r>
+          </a:p>
+          <a:p>
+            <a:pPr lvl="1">
+              <a:spcAft>
+                <a:spcPts val="400"/>
+              </a:spcAft>
+              <a:defRPr sz="1600" b="0">
+                <a:solidFill>
+                  <a:srgbClr val="182030"/>
+                </a:solidFill>
+                <a:latin typeface="微软雅黑"/>
+              </a:defRPr>
+            </a:pPr>
+            <a:r>
+              <a:t>⇒ 渲染进程申请失败 → Chromium 判定 OOM → 杀进程</a:t>
+            </a:r>
+          </a:p>
+          <a:p>
+            <a:pPr>
+              <a:spcAft>
+                <a:spcPts val="800"/>
+              </a:spcAft>
+              <a:defRPr sz="1600" b="1">
+                <a:solidFill>
+                  <a:srgbClr val="182030"/>
+                </a:solidFill>
+                <a:latin typeface="微软雅黑"/>
+              </a:defRPr>
+            </a:pPr>
+            <a:r>
+              <a:t>处置：把「崩溃」变成「可恢复」</a:t>
+            </a:r>
+          </a:p>
+          <a:p>
+            <a:pPr lvl="1">
+              <a:spcAft>
+                <a:spcPts val="400"/>
+              </a:spcAft>
+              <a:defRPr sz="1600" b="0">
+                <a:solidFill>
+                  <a:srgbClr val="182030"/>
+                </a:solidFill>
+                <a:latin typeface="微软雅黑"/>
+              </a:defRPr>
+            </a:pPr>
+            <a:r>
+              <a:t>训练按 --resume 姿态运行：每次被打断最多损失 1 轮（约 63 秒）</a:t>
+            </a:r>
+          </a:p>
+          <a:p>
+            <a:pPr lvl="1">
+              <a:spcAft>
+                <a:spcPts val="400"/>
+              </a:spcAft>
+              <a:defRPr sz="1600" b="0">
+                <a:solidFill>
+                  <a:srgbClr val="182030"/>
+                </a:solidFill>
+                <a:latin typeface="微软雅黑"/>
+              </a:defRPr>
+            </a:pPr>
+            <a:r>
+              <a:t>定时巡检按「GPU 利用率 + 产物行数」判活，死亡后自动重拉</a:t>
+            </a:r>
+          </a:p>
+          <a:p>
+            <a:pPr lvl="1">
+              <a:spcAft>
+                <a:spcPts val="400"/>
+              </a:spcAft>
+              <a:defRPr sz="1600" b="0">
+                <a:solidFill>
+                  <a:srgbClr val="182030"/>
+                </a:solidFill>
+                <a:latin typeface="微软雅黑"/>
+              </a:defRPr>
+            </a:pPr>
+            <a:r>
+              <a:t>崩溃报告 / minidump / 内存曲线全部留档，评委可独立复算</a:t>
+            </a:r>
+          </a:p>
+        </p:txBody>
+      </p:sp>
+    </p:spTree>
+  </p:cSld>
+  <p:clrMapOvr>
+    <a:masterClrMapping/>
+  </p:clrMapOvr>
+</p:sld>
+</file>
+
+<file path=ppt/slides/slide21.xml><?xml version="1.0" encoding="utf-8"?>
+<p:sld xmlns:a="http://schemas.openxmlformats.org/drawingml/2006/main" xmlns:p="http://schemas.openxmlformats.org/presentationml/2006/main" xmlns:r="http://schemas.openxmlformats.org/officeDocument/2006/relationships">
+  <p:cSld>
     <p:bg>
       <p:bgPr>
         <a:solidFill>
@@ -8548,6 +8900,704 @@
             </a:pPr>
             <a:r>
               <a:t>北京建筑大学 · 第六届萌新种子杯视觉赛道创新题</a:t>
+            </a:r>
+          </a:p>
+        </p:txBody>
+      </p:sp>
+    </p:spTree>
+  </p:cSld>
+  <p:clrMapOvr>
+    <a:masterClrMapping/>
+  </p:clrMapOvr>
+</p:sld>
+</file>
+
+<file path=ppt/slides/slide22.xml><?xml version="1.0" encoding="utf-8"?>
+<p:sld xmlns:a="http://schemas.openxmlformats.org/drawingml/2006/main" xmlns:p="http://schemas.openxmlformats.org/presentationml/2006/main" xmlns:r="http://schemas.openxmlformats.org/officeDocument/2006/relationships">
+  <p:cSld>
+    <p:spTree>
+      <p:nvGrpSpPr>
+        <p:cNvPr id="1" name=""/>
+        <p:cNvGrpSpPr/>
+        <p:nvPr/>
+      </p:nvGrpSpPr>
+      <p:grpSpPr/>
+      <p:sp>
+        <p:nvSpPr>
+          <p:cNvPr id="2" name="Rectangle 1"/>
+          <p:cNvSpPr/>
+          <p:nvPr/>
+        </p:nvSpPr>
+        <p:spPr>
+          <a:xfrm>
+            <a:off x="0" y="0"/>
+            <a:ext cx="9144000" cy="1005840"/>
+          </a:xfrm>
+          <a:prstGeom prst="rect">
+            <a:avLst/>
+          </a:prstGeom>
+          <a:solidFill>
+            <a:srgbClr val="2563EB"/>
+          </a:solidFill>
+          <a:ln>
+            <a:noFill/>
+          </a:ln>
+        </p:spPr>
+        <p:style>
+          <a:lnRef idx="1">
+            <a:schemeClr val="accent1"/>
+          </a:lnRef>
+          <a:fillRef idx="3">
+            <a:schemeClr val="accent1"/>
+          </a:fillRef>
+          <a:effectRef idx="2">
+            <a:schemeClr val="accent1"/>
+          </a:effectRef>
+          <a:fontRef idx="minor">
+            <a:schemeClr val="lt1"/>
+          </a:fontRef>
+        </p:style>
+        <p:txBody>
+          <a:bodyPr rtlCol="0" anchor="ctr"/>
+          <a:lstStyle/>
+          <a:p>
+            <a:pPr algn="ctr"/>
+          </a:p>
+        </p:txBody>
+      </p:sp>
+      <p:sp>
+        <p:nvSpPr>
+          <p:cNvPr id="3" name="Rectangle 2"/>
+          <p:cNvSpPr/>
+          <p:nvPr/>
+        </p:nvSpPr>
+        <p:spPr>
+          <a:xfrm>
+            <a:off x="274320" y="228600"/>
+            <a:ext cx="548640" cy="548640"/>
+          </a:xfrm>
+          <a:prstGeom prst="rect">
+            <a:avLst/>
+          </a:prstGeom>
+          <a:solidFill>
+            <a:srgbClr val="7C3AED"/>
+          </a:solidFill>
+          <a:ln>
+            <a:noFill/>
+          </a:ln>
+        </p:spPr>
+        <p:style>
+          <a:lnRef idx="1">
+            <a:schemeClr val="accent1"/>
+          </a:lnRef>
+          <a:fillRef idx="3">
+            <a:schemeClr val="accent1"/>
+          </a:fillRef>
+          <a:effectRef idx="2">
+            <a:schemeClr val="accent1"/>
+          </a:effectRef>
+          <a:fontRef idx="minor">
+            <a:schemeClr val="lt1"/>
+          </a:fontRef>
+        </p:style>
+        <p:txBody>
+          <a:bodyPr rtlCol="0" anchor="ctr"/>
+          <a:lstStyle/>
+          <a:p>
+            <a:pPr algn="ctr">
+              <a:defRPr sz="2000" b="1">
+                <a:solidFill>
+                  <a:srgbClr val="FFFFFF"/>
+                </a:solidFill>
+                <a:latin typeface="微软雅黑"/>
+              </a:defRPr>
+            </a:pPr>
+            <a:r>
+              <a:t>05</a:t>
+            </a:r>
+          </a:p>
+        </p:txBody>
+      </p:sp>
+      <p:sp>
+        <p:nvSpPr>
+          <p:cNvPr id="4" name="TextBox 3"/>
+          <p:cNvSpPr txBox="1"/>
+          <p:nvPr/>
+        </p:nvSpPr>
+        <p:spPr>
+          <a:xfrm>
+            <a:off x="1097280" y="91440"/>
+            <a:ext cx="7498080" cy="822960"/>
+          </a:xfrm>
+          <a:prstGeom prst="rect">
+            <a:avLst/>
+          </a:prstGeom>
+          <a:noFill/>
+        </p:spPr>
+        <p:txBody>
+          <a:bodyPr wrap="square">
+            <a:spAutoFit/>
+          </a:bodyPr>
+          <a:lstStyle/>
+          <a:p>
+            <a:pPr algn="l">
+              <a:defRPr sz="2400" b="1">
+                <a:solidFill>
+                  <a:srgbClr val="FFFFFF"/>
+                </a:solidFill>
+                <a:latin typeface="微软雅黑"/>
+              </a:defRPr>
+            </a:pPr>
+            <a:r>
+              <a:t>外部检验：把 BFDD 当作一把外部的尺子</a:t>
+            </a:r>
+          </a:p>
+        </p:txBody>
+      </p:sp>
+      <p:sp>
+        <p:nvSpPr>
+          <p:cNvPr id="5" name="TextBox 4"/>
+          <p:cNvSpPr txBox="1"/>
+          <p:nvPr/>
+        </p:nvSpPr>
+        <p:spPr>
+          <a:xfrm>
+            <a:off x="731520" y="1234440"/>
+            <a:ext cx="7680960" cy="5029200"/>
+          </a:xfrm>
+          <a:prstGeom prst="rect">
+            <a:avLst/>
+          </a:prstGeom>
+          <a:noFill/>
+        </p:spPr>
+        <p:txBody>
+          <a:bodyPr wrap="square">
+            <a:spAutoFit/>
+          </a:bodyPr>
+          <a:lstStyle/>
+          <a:p>
+            <a:pPr>
+              <a:spcAft>
+                <a:spcPts val="800"/>
+              </a:spcAft>
+              <a:defRPr sz="1600" b="1">
+                <a:solidFill>
+                  <a:srgbClr val="182030"/>
+                </a:solidFill>
+                <a:latin typeface="微软雅黑"/>
+              </a:defRPr>
+            </a:pPr>
+            <a:r>
+              <a:t>数据：838 对 RGB + 红外像素级对齐（CC BY 4.0，东南大学），从未参与训练</a:t>
+            </a:r>
+          </a:p>
+          <a:p>
+            <a:pPr lvl="1">
+              <a:spcAft>
+                <a:spcPts val="400"/>
+              </a:spcAft>
+              <a:defRPr sz="1600" b="0">
+                <a:solidFill>
+                  <a:srgbClr val="182030"/>
+                </a:solidFill>
+                <a:latin typeface="微软雅黑"/>
+              </a:defRPr>
+            </a:pPr>
+            <a:r>
+              <a:t>用法：不训练、不改 V3 —— 只把它当外部尺子，量我们自己的边界</a:t>
+            </a:r>
+          </a:p>
+          <a:p>
+            <a:pPr>
+              <a:spcAft>
+                <a:spcPts val="800"/>
+              </a:spcAft>
+              <a:defRPr sz="1600" b="1">
+                <a:solidFill>
+                  <a:srgbClr val="182030"/>
+                </a:solidFill>
+                <a:latin typeface="微软雅黑"/>
+              </a:defRPr>
+            </a:pPr>
+            <a:r>
+              <a:t>跨源零样本：裂缝检出的 AP50 从 0.7283 掉到 0.0026（−99.6%）</a:t>
+            </a:r>
+          </a:p>
+          <a:p>
+            <a:pPr lvl="1">
+              <a:spcAft>
+                <a:spcPts val="400"/>
+              </a:spcAft>
+              <a:defRPr sz="1600" b="0">
+                <a:solidFill>
+                  <a:srgbClr val="182030"/>
+                </a:solidFill>
+                <a:latin typeface="微软雅黑"/>
+              </a:defRPr>
+            </a:pPr>
+            <a:r>
+              <a:t>先排除三种朴素解释：不是分辨率（1280 反而更差）、不是框语义偏差、不是模型无响应</a:t>
+            </a:r>
+          </a:p>
+          <a:p>
+            <a:pPr lvl="1">
+              <a:spcAft>
+                <a:spcPts val="400"/>
+              </a:spcAft>
+              <a:defRPr sz="1600" b="0">
+                <a:solidFill>
+                  <a:srgbClr val="182030"/>
+                </a:solidFill>
+                <a:latin typeface="微软雅黑"/>
+              </a:defRPr>
+            </a:pPr>
+            <a:r>
+              <a:t>真因是「置信度塌陷」：中位 conf 0.466 → 0.094；达阈值比例 67.0% → 4.4%</a:t>
+            </a:r>
+          </a:p>
+          <a:p>
+            <a:pPr>
+              <a:spcAft>
+                <a:spcPts val="800"/>
+              </a:spcAft>
+              <a:defRPr sz="1600" b="1">
+                <a:solidFill>
+                  <a:srgbClr val="182030"/>
+                </a:solidFill>
+                <a:latin typeface="微软雅黑"/>
+              </a:defRPr>
+            </a:pPr>
+            <a:r>
+              <a:t>★ 由此发现我们自己的一个缺口：弃权挡不住「模型在分布外失效」</a:t>
+            </a:r>
+          </a:p>
+          <a:p>
+            <a:pPr lvl="1">
+              <a:spcAft>
+                <a:spcPts val="400"/>
+              </a:spcAft>
+              <a:defRPr sz="1600" b="0">
+                <a:solidFill>
+                  <a:srgbClr val="182030"/>
+                </a:solidFill>
+                <a:latin typeface="微软雅黑"/>
+              </a:defRPr>
+            </a:pPr>
+            <a:r>
+              <a:t>几何合格 + 图像清晰时，系统仍会输出风险等级 B —— 一个结构性安全表述</a:t>
+            </a:r>
+          </a:p>
+          <a:p>
+            <a:pPr lvl="1">
+              <a:spcAft>
+                <a:spcPts val="400"/>
+              </a:spcAft>
+              <a:defRPr sz="1600" b="0">
+                <a:solidFill>
+                  <a:srgbClr val="182030"/>
+                </a:solidFill>
+                <a:latin typeface="微软雅黑"/>
+              </a:defRPr>
+            </a:pPr>
+            <a:r>
+              <a:t>⇒ 弃权是「几何 + 成像」驱动的；模型层的失效信号尚未接入（如实标为未实现）</a:t>
+            </a:r>
+          </a:p>
+          <a:p>
+            <a:pPr>
+              <a:spcAft>
+                <a:spcPts val="800"/>
+              </a:spcAft>
+              <a:defRPr sz="1600" b="1">
+                <a:solidFill>
+                  <a:srgbClr val="182030"/>
+                </a:solidFill>
+                <a:latin typeface="微软雅黑"/>
+              </a:defRPr>
+            </a:pPr>
+            <a:r>
+              <a:t>另一件必须说的：一个我们做不出来的负结果</a:t>
+            </a:r>
+          </a:p>
+          <a:p>
+            <a:pPr lvl="1">
+              <a:spcAft>
+                <a:spcPts val="400"/>
+              </a:spcAft>
+              <a:defRPr sz="1600" b="0">
+                <a:solidFill>
+                  <a:srgbClr val="182030"/>
+                </a:solidFill>
+                <a:latin typeface="微软雅黑"/>
+              </a:defRPr>
+            </a:pPr>
+            <a:r>
+              <a:t>本想量化「空鼓能否从可见光恢复」，但该数据的标注本身就是在可见光上做的</a:t>
+            </a:r>
+          </a:p>
+          <a:p>
+            <a:pPr lvl="1">
+              <a:spcAft>
+                <a:spcPts val="400"/>
+              </a:spcAft>
+              <a:defRPr sz="1600" b="0">
+                <a:solidFill>
+                  <a:srgbClr val="182030"/>
+                </a:solidFill>
+                <a:latin typeface="微软雅黑"/>
+              </a:defRPr>
+            </a:pPr>
+            <a:r>
+              <a:t>⇒ 该对比对红外结构性不利，既不证实也不证伪 §9.2；如实记为负结果</a:t>
+            </a:r>
+          </a:p>
+        </p:txBody>
+      </p:sp>
+    </p:spTree>
+  </p:cSld>
+  <p:clrMapOvr>
+    <a:masterClrMapping/>
+  </p:clrMapOvr>
+</p:sld>
+</file>
+
+<file path=ppt/slides/slide23.xml><?xml version="1.0" encoding="utf-8"?>
+<p:sld xmlns:a="http://schemas.openxmlformats.org/drawingml/2006/main" xmlns:p="http://schemas.openxmlformats.org/presentationml/2006/main" xmlns:r="http://schemas.openxmlformats.org/officeDocument/2006/relationships">
+  <p:cSld>
+    <p:spTree>
+      <p:nvGrpSpPr>
+        <p:cNvPr id="1" name=""/>
+        <p:cNvGrpSpPr/>
+        <p:nvPr/>
+      </p:nvGrpSpPr>
+      <p:grpSpPr/>
+      <p:sp>
+        <p:nvSpPr>
+          <p:cNvPr id="2" name="Rectangle 1"/>
+          <p:cNvSpPr/>
+          <p:nvPr/>
+        </p:nvSpPr>
+        <p:spPr>
+          <a:xfrm>
+            <a:off x="0" y="0"/>
+            <a:ext cx="9144000" cy="1005840"/>
+          </a:xfrm>
+          <a:prstGeom prst="rect">
+            <a:avLst/>
+          </a:prstGeom>
+          <a:solidFill>
+            <a:srgbClr val="2563EB"/>
+          </a:solidFill>
+          <a:ln>
+            <a:noFill/>
+          </a:ln>
+        </p:spPr>
+        <p:style>
+          <a:lnRef idx="1">
+            <a:schemeClr val="accent1"/>
+          </a:lnRef>
+          <a:fillRef idx="3">
+            <a:schemeClr val="accent1"/>
+          </a:fillRef>
+          <a:effectRef idx="2">
+            <a:schemeClr val="accent1"/>
+          </a:effectRef>
+          <a:fontRef idx="minor">
+            <a:schemeClr val="lt1"/>
+          </a:fontRef>
+        </p:style>
+        <p:txBody>
+          <a:bodyPr rtlCol="0" anchor="ctr"/>
+          <a:lstStyle/>
+          <a:p>
+            <a:pPr algn="ctr"/>
+          </a:p>
+        </p:txBody>
+      </p:sp>
+      <p:sp>
+        <p:nvSpPr>
+          <p:cNvPr id="3" name="Rectangle 2"/>
+          <p:cNvSpPr/>
+          <p:nvPr/>
+        </p:nvSpPr>
+        <p:spPr>
+          <a:xfrm>
+            <a:off x="274320" y="228600"/>
+            <a:ext cx="548640" cy="548640"/>
+          </a:xfrm>
+          <a:prstGeom prst="rect">
+            <a:avLst/>
+          </a:prstGeom>
+          <a:solidFill>
+            <a:srgbClr val="7C3AED"/>
+          </a:solidFill>
+          <a:ln>
+            <a:noFill/>
+          </a:ln>
+        </p:spPr>
+        <p:style>
+          <a:lnRef idx="1">
+            <a:schemeClr val="accent1"/>
+          </a:lnRef>
+          <a:fillRef idx="3">
+            <a:schemeClr val="accent1"/>
+          </a:fillRef>
+          <a:effectRef idx="2">
+            <a:schemeClr val="accent1"/>
+          </a:effectRef>
+          <a:fontRef idx="minor">
+            <a:schemeClr val="lt1"/>
+          </a:fontRef>
+        </p:style>
+        <p:txBody>
+          <a:bodyPr rtlCol="0" anchor="ctr"/>
+          <a:lstStyle/>
+          <a:p>
+            <a:pPr algn="ctr">
+              <a:defRPr sz="2000" b="1">
+                <a:solidFill>
+                  <a:srgbClr val="FFFFFF"/>
+                </a:solidFill>
+                <a:latin typeface="微软雅黑"/>
+              </a:defRPr>
+            </a:pPr>
+            <a:r>
+              <a:t>05</a:t>
+            </a:r>
+          </a:p>
+        </p:txBody>
+      </p:sp>
+      <p:sp>
+        <p:nvSpPr>
+          <p:cNvPr id="4" name="TextBox 3"/>
+          <p:cNvSpPr txBox="1"/>
+          <p:nvPr/>
+        </p:nvSpPr>
+        <p:spPr>
+          <a:xfrm>
+            <a:off x="1097280" y="91440"/>
+            <a:ext cx="7498080" cy="822960"/>
+          </a:xfrm>
+          <a:prstGeom prst="rect">
+            <a:avLst/>
+          </a:prstGeom>
+          <a:noFill/>
+        </p:spPr>
+        <p:txBody>
+          <a:bodyPr wrap="square">
+            <a:spAutoFit/>
+          </a:bodyPr>
+          <a:lstStyle/>
+          <a:p>
+            <a:pPr algn="l">
+              <a:defRPr sz="2400" b="1">
+                <a:solidFill>
+                  <a:srgbClr val="FFFFFF"/>
+                </a:solidFill>
+                <a:latin typeface="微软雅黑"/>
+              </a:defRPr>
+            </a:pPr>
+            <a:r>
+              <a:t>从「判不了」到「下一步」：区间与决策</a:t>
+            </a:r>
+          </a:p>
+        </p:txBody>
+      </p:sp>
+      <p:sp>
+        <p:nvSpPr>
+          <p:cNvPr id="5" name="TextBox 4"/>
+          <p:cNvSpPr txBox="1"/>
+          <p:nvPr/>
+        </p:nvSpPr>
+        <p:spPr>
+          <a:xfrm>
+            <a:off x="731520" y="1234440"/>
+            <a:ext cx="7680960" cy="5029200"/>
+          </a:xfrm>
+          <a:prstGeom prst="rect">
+            <a:avLst/>
+          </a:prstGeom>
+          <a:noFill/>
+        </p:spPr>
+        <p:txBody>
+          <a:bodyPr wrap="square">
+            <a:spAutoFit/>
+          </a:bodyPr>
+          <a:lstStyle/>
+          <a:p>
+            <a:pPr>
+              <a:spcAft>
+                <a:spcPts val="800"/>
+              </a:spcAft>
+              <a:defRPr sz="1600" b="1">
+                <a:solidFill>
+                  <a:srgbClr val="182030"/>
+                </a:solidFill>
+                <a:latin typeface="微软雅黑"/>
+              </a:defRPr>
+            </a:pPr>
+            <a:r>
+              <a:t>不只给点值：测量值配上 90% 区间（conformal，按目标像素数分箱）</a:t>
+            </a:r>
+          </a:p>
+          <a:p>
+            <a:pPr lvl="1">
+              <a:spcAft>
+                <a:spcPts val="400"/>
+              </a:spcAft>
+              <a:defRPr sz="1600" b="0">
+                <a:solidFill>
+                  <a:srgbClr val="182030"/>
+                </a:solidFill>
+                <a:latin typeface="微软雅黑"/>
+              </a:defRPr>
+            </a:pPr>
+            <a:r>
+              <a:t>独立测试集覆盖率 93.5%（两箱分别 96.7% / 91.3%），目标 90%</a:t>
+            </a:r>
+          </a:p>
+          <a:p>
+            <a:pPr lvl="1">
+              <a:spcAft>
+                <a:spcPts val="400"/>
+              </a:spcAft>
+              <a:defRPr sz="1600" b="0">
+                <a:solidFill>
+                  <a:srgbClr val="182030"/>
+                </a:solidFill>
+                <a:latin typeface="微软雅黑"/>
+              </a:defRPr>
+            </a:pPr>
+            <a:r>
+              <a:t>分箱是必要的：两箱偏差方向相反（+0.33mm / −8.62mm），不分箱会被混掉</a:t>
+            </a:r>
+          </a:p>
+          <a:p>
+            <a:pPr>
+              <a:spcAft>
+                <a:spcPts val="800"/>
+              </a:spcAft>
+              <a:defRPr sz="1600" b="1">
+                <a:solidFill>
+                  <a:srgbClr val="182030"/>
+                </a:solidFill>
+                <a:latin typeface="微软雅黑"/>
+              </a:defRPr>
+            </a:pPr>
+            <a:r>
+              <a:t>「下一步」：给结论 / 建议再拍 / 建议专业鉴定 —— 期望损失最小者</a:t>
+            </a:r>
+          </a:p>
+          <a:p>
+            <a:pPr lvl="1">
+              <a:spcAft>
+                <a:spcPts val="400"/>
+              </a:spcAft>
+              <a:defRPr sz="1600" b="0">
+                <a:solidFill>
+                  <a:srgbClr val="182030"/>
+                </a:solidFill>
+                <a:latin typeface="微软雅黑"/>
+              </a:defRPr>
+            </a:pPr>
+            <a:r>
+              <a:t>P(误差) 取自实测：接受带 29.24%，两个拒绝区 73.3% / 83.8%</a:t>
+            </a:r>
+          </a:p>
+          <a:p>
+            <a:pPr lvl="1">
+              <a:spcAft>
+                <a:spcPts val="400"/>
+              </a:spcAft>
+              <a:defRPr sz="1600" b="0">
+                <a:solidFill>
+                  <a:srgbClr val="182030"/>
+                </a:solidFill>
+                <a:latin typeface="微软雅黑"/>
+              </a:defRPr>
+            </a:pPr>
+            <a:r>
+              <a:t>不给成本定值，只给参数化边界：「在成本比 = r 时，最优行动是 X」</a:t>
+            </a:r>
+          </a:p>
+          <a:p>
+            <a:pPr>
+              <a:spcAft>
+                <a:spcPts val="800"/>
+              </a:spcAft>
+              <a:defRPr sz="1600" b="1">
+                <a:solidFill>
+                  <a:srgbClr val="182030"/>
+                </a:solidFill>
+                <a:latin typeface="微软雅黑"/>
+              </a:defRPr>
+            </a:pPr>
+            <a:r>
+              <a:t>★ 但区间也有它自己的边界，我们不藏</a:t>
+            </a:r>
+          </a:p>
+          <a:p>
+            <a:pPr lvl="1">
+              <a:spcAft>
+                <a:spcPts val="400"/>
+              </a:spcAft>
+              <a:defRPr sz="1600" b="0">
+                <a:solidFill>
+                  <a:srgbClr val="182030"/>
+                </a:solidFill>
+                <a:latin typeface="微软雅黑"/>
+              </a:defRPr>
+            </a:pPr>
+            <a:r>
+              <a:t>合成域校准 ⇒ 只声称「合成域上覆盖率已验证」，不声称「真机 90% 保证」</a:t>
+            </a:r>
+          </a:p>
+          <a:p>
+            <a:pPr lvl="1">
+              <a:spcAft>
+                <a:spcPts val="400"/>
+              </a:spcAft>
+              <a:defRPr sz="1600" b="0">
+                <a:solidFill>
+                  <a:srgbClr val="182030"/>
+                </a:solidFill>
+                <a:latin typeface="微软雅黑"/>
+              </a:defRPr>
+            </a:pPr>
+            <a:r>
+              <a:t>区间实测很宽（1.73mm ⇒ [0.73, 6.36]mm），界面明写「信息量低，不宜据此判定」</a:t>
+            </a:r>
+          </a:p>
+          <a:p>
+            <a:pPr>
+              <a:spcAft>
+                <a:spcPts val="800"/>
+              </a:spcAft>
+              <a:defRPr sz="1600" b="1">
+                <a:solidFill>
+                  <a:srgbClr val="182030"/>
+                </a:solidFill>
+                <a:latin typeface="微软雅黑"/>
+              </a:defRPr>
+            </a:pPr>
+            <a:r>
+              <a:t>还有一个我们明确不做的方向：时间演化预测</a:t>
+            </a:r>
+          </a:p>
+          <a:p>
+            <a:pPr lvl="1">
+              <a:spcAft>
+                <a:spcPts val="400"/>
+              </a:spcAft>
+              <a:defRPr sz="1600" b="0">
+                <a:solidFill>
+                  <a:srgbClr val="182030"/>
+                </a:solidFill>
+                <a:latin typeface="微软雅黑"/>
+              </a:defRPr>
+            </a:pPr>
+            <a:r>
+              <a:t>无日期字段、图片 0 EXIF、同楼无重复巡检、投稿 0 条 ⇒ 写清边界与补足条件</a:t>
             </a:r>
           </a:p>
         </p:txBody>

--- a/07_report/外墙缺陷智能筛查_答辩PPT.pptx
+++ b/07_report/外墙缺陷智能筛查_答辩PPT.pptx
@@ -6305,7 +6305,23 @@
               </a:defRPr>
             </a:pPr>
             <a:r>
-              <a:t>★ 已开源：GitHub 公开仓库 https://github.com/dutanlu/wall-defect-screening ，259 文件 / 2.84 MB，MIT 许可；数据集与权重按许可不上传，只提供构建脚本</a:t>
+              <a:t>★ 已开源：GitHub 公开仓库 https://github.com/dutanlu/wall-defect-screening ，377 文件 / 4.22 MB，MIT 许可；数据集与权重按许可不上传，只提供构建脚本</a:t>
+            </a:r>
+          </a:p>
+          <a:p>
+            <a:pPr>
+              <a:spcAft>
+                <a:spcPts val="800"/>
+              </a:spcAft>
+              <a:defRPr sz="1600" b="1">
+                <a:solidFill>
+                  <a:srgbClr val="182030"/>
+                </a:solidFill>
+                <a:latin typeface="微软雅黑"/>
+              </a:defRPr>
+            </a:pPr>
+            <a:r>
+              <a:t>⑧ 工程化：Web 新增「🗂️ 批量识别」页签（一次一批照片 → 一张表 + 汇总，285 图实测 12 秒）；实时流支持多路（本机实测可跑 3~4 路，每路 4.7~7 fps，合计 18.3→23.9 fps，瓶颈是一个模型串行用 GPU）</a:t>
             </a:r>
           </a:p>
         </p:txBody>
@@ -7117,7 +7133,7 @@
               </a:defRPr>
             </a:pPr>
             <a:r>
-              <a:t>真遇到的困难：类别不全（4→7 类）、自带划分泄漏 25.64%、长尾 43:1</a:t>
+              <a:t>真遇到的困难：类别不全（4→7 类）、自带划分泄漏 25.64%、长尾 43:1（全数据集口径）</a:t>
             </a:r>
           </a:p>
           <a:p>
@@ -7133,7 +7149,7 @@
               </a:defRPr>
             </a:pPr>
             <a:r>
-              <a:t>小样本类 CI ±0.16 ⇒ 不跨模型比大小；量化失败；空鼓只能给间接迹象</a:t>
+              <a:t>小样本类 CI ±0.13 ⇒ 不跨模型比大小；量化失败；空鼓只能给间接迹象</a:t>
             </a:r>
           </a:p>
           <a:p>
@@ -7478,6 +7494,54 @@
             </a:r>
           </a:p>
           <a:p>
+            <a:pPr lvl="1">
+              <a:spcAft>
+                <a:spcPts val="400"/>
+              </a:spcAft>
+              <a:defRPr sz="1600" b="0">
+                <a:solidFill>
+                  <a:srgbClr val="182030"/>
+                </a:solidFill>
+                <a:latin typeface="微软雅黑"/>
+              </a:defRPr>
+            </a:pPr>
+            <a:r>
+              <a:t>第四，我们也对自己做同样的检查：本轮查出系统内两处边界，均已如实处理</a:t>
+            </a:r>
+          </a:p>
+          <a:p>
+            <a:pPr lvl="1">
+              <a:spcAft>
+                <a:spcPts val="400"/>
+              </a:spcAft>
+              <a:defRPr sz="1600" b="0">
+                <a:solidFill>
+                  <a:srgbClr val="182030"/>
+                </a:solidFill>
+                <a:latin typeface="微软雅黑"/>
+              </a:defRPr>
+            </a:pPr>
+            <a:r>
+              <a:t>① 块状面积的面积判据在真实数据上**从未触发**（292 实例 ratio 最大 2.7% &lt; 5% 门槛，danger 0/292；且阈值本身无来源）⇒ 已写为能力边界，不改口径</a:t>
+            </a:r>
+          </a:p>
+          <a:p>
+            <a:pPr lvl="1">
+              <a:spcAft>
+                <a:spcPts val="400"/>
+              </a:spcAft>
+              <a:defRPr sz="1600" b="0">
+                <a:solidFill>
+                  <a:srgbClr val="182030"/>
+                </a:solidFill>
+                <a:latin typeface="微软雅黑"/>
+              </a:defRPr>
+            </a:pPr>
+            <a:r>
+              <a:t>② 空掩膜曾被报成「几何合格」⇒ 在少数类别上可能把「测不了」说成「没问题」（假安全）；已修为显式弃权</a:t>
+            </a:r>
+          </a:p>
+          <a:p>
             <a:pPr>
               <a:spcAft>
                 <a:spcPts val="800"/>
@@ -8695,14 +8759,6 @@
 <file path=ppt/slides/slide21.xml><?xml version="1.0" encoding="utf-8"?>
 <p:sld xmlns:a="http://schemas.openxmlformats.org/drawingml/2006/main" xmlns:p="http://schemas.openxmlformats.org/presentationml/2006/main" xmlns:r="http://schemas.openxmlformats.org/officeDocument/2006/relationships">
   <p:cSld>
-    <p:bg>
-      <p:bgPr>
-        <a:solidFill>
-          <a:srgbClr val="2563EB"/>
-        </a:solidFill>
-        <a:effectLst/>
-      </p:bgPr>
-    </p:bg>
     <p:spTree>
       <p:nvGrpSpPr>
         <p:cNvPr id="1" name=""/>
@@ -8718,14 +8774,14 @@
         </p:nvSpPr>
         <p:spPr>
           <a:xfrm>
-            <a:off x="0" y="5394960"/>
-            <a:ext cx="9144000" cy="1463040"/>
+            <a:off x="0" y="0"/>
+            <a:ext cx="9144000" cy="1005840"/>
           </a:xfrm>
           <a:prstGeom prst="rect">
             <a:avLst/>
           </a:prstGeom>
           <a:solidFill>
-            <a:srgbClr val="0891B2"/>
+            <a:srgbClr val="2563EB"/>
           </a:solidFill>
           <a:ln>
             <a:noFill/>
@@ -8761,8 +8817,8 @@
         </p:nvSpPr>
         <p:spPr>
           <a:xfrm>
-            <a:off x="2834640" y="1463040"/>
-            <a:ext cx="1371600" cy="63500"/>
+            <a:off x="274320" y="228600"/>
+            <a:ext cx="548640" cy="548640"/>
           </a:xfrm>
           <a:prstGeom prst="rect">
             <a:avLst/>
@@ -8792,7 +8848,17 @@
           <a:bodyPr rtlCol="0" anchor="ctr"/>
           <a:lstStyle/>
           <a:p>
-            <a:pPr algn="ctr"/>
+            <a:pPr algn="ctr">
+              <a:defRPr sz="2000" b="1">
+                <a:solidFill>
+                  <a:srgbClr val="FFFFFF"/>
+                </a:solidFill>
+                <a:latin typeface="微软雅黑"/>
+              </a:defRPr>
+            </a:pPr>
+            <a:r>
+              <a:t>05</a:t>
+            </a:r>
           </a:p>
         </p:txBody>
       </p:sp>
@@ -8804,8 +8870,8 @@
         </p:nvSpPr>
         <p:spPr>
           <a:xfrm>
-            <a:off x="914400" y="2011680"/>
-            <a:ext cx="7315200" cy="1188720"/>
+            <a:off x="1097280" y="91440"/>
+            <a:ext cx="7498080" cy="822960"/>
           </a:xfrm>
           <a:prstGeom prst="rect">
             <a:avLst/>
@@ -8818,8 +8884,8 @@
           </a:bodyPr>
           <a:lstStyle/>
           <a:p>
-            <a:pPr algn="ctr">
-              <a:defRPr sz="4400" b="1">
+            <a:pPr algn="l">
+              <a:defRPr sz="2400" b="1">
                 <a:solidFill>
                   <a:srgbClr val="FFFFFF"/>
                 </a:solidFill>
@@ -8827,7 +8893,7 @@
               </a:defRPr>
             </a:pPr>
             <a:r>
-              <a:t>谢谢各位评委老师</a:t>
+              <a:t>外部检验：把 BFDD 当作一把外部的尺子</a:t>
             </a:r>
           </a:p>
         </p:txBody>
@@ -8840,8 +8906,8 @@
         </p:nvSpPr>
         <p:spPr>
           <a:xfrm>
-            <a:off x="914400" y="3383280"/>
-            <a:ext cx="7315200" cy="914400"/>
+            <a:off x="731520" y="1234440"/>
+            <a:ext cx="7680960" cy="5029200"/>
           </a:xfrm>
           <a:prstGeom prst="rect">
             <a:avLst/>
@@ -8854,52 +8920,179 @@
           </a:bodyPr>
           <a:lstStyle/>
           <a:p>
-            <a:pPr algn="ctr">
-              <a:defRPr sz="2000">
-                <a:solidFill>
-                  <a:srgbClr val="DEE7FC"/>
-                </a:solidFill>
-                <a:latin typeface="微软雅黑"/>
-              </a:defRPr>
-            </a:pPr>
-            <a:r>
-              <a:t>一个知道自己什么时候不该给结论的筛查系统</a:t>
-            </a:r>
-          </a:p>
-        </p:txBody>
-      </p:sp>
-      <p:sp>
-        <p:nvSpPr>
-          <p:cNvPr id="6" name="TextBox 5"/>
-          <p:cNvSpPr txBox="1"/>
-          <p:nvPr/>
-        </p:nvSpPr>
-        <p:spPr>
-          <a:xfrm>
-            <a:off x="914400" y="5806440"/>
-            <a:ext cx="7315200" cy="640080"/>
-          </a:xfrm>
-          <a:prstGeom prst="rect">
-            <a:avLst/>
-          </a:prstGeom>
-          <a:noFill/>
-        </p:spPr>
-        <p:txBody>
-          <a:bodyPr wrap="square">
-            <a:spAutoFit/>
-          </a:bodyPr>
-          <a:lstStyle/>
-          <a:p>
-            <a:pPr algn="ctr">
-              <a:defRPr sz="1400">
-                <a:solidFill>
-                  <a:srgbClr val="FFFFFF"/>
-                </a:solidFill>
-                <a:latin typeface="微软雅黑"/>
-              </a:defRPr>
-            </a:pPr>
-            <a:r>
-              <a:t>北京建筑大学 · 第六届萌新种子杯视觉赛道创新题</a:t>
+            <a:pPr>
+              <a:spcAft>
+                <a:spcPts val="800"/>
+              </a:spcAft>
+              <a:defRPr sz="1600" b="1">
+                <a:solidFill>
+                  <a:srgbClr val="182030"/>
+                </a:solidFill>
+                <a:latin typeface="微软雅黑"/>
+              </a:defRPr>
+            </a:pPr>
+            <a:r>
+              <a:t>数据：838 对 RGB + 红外像素级对齐（CC BY 4.0，东南大学），从未参与训练</a:t>
+            </a:r>
+          </a:p>
+          <a:p>
+            <a:pPr lvl="1">
+              <a:spcAft>
+                <a:spcPts val="400"/>
+              </a:spcAft>
+              <a:defRPr sz="1600" b="0">
+                <a:solidFill>
+                  <a:srgbClr val="182030"/>
+                </a:solidFill>
+                <a:latin typeface="微软雅黑"/>
+              </a:defRPr>
+            </a:pPr>
+            <a:r>
+              <a:t>用法：不训练、不改 V3 —— 只把它当外部尺子，量我们自己的边界</a:t>
+            </a:r>
+          </a:p>
+          <a:p>
+            <a:pPr>
+              <a:spcAft>
+                <a:spcPts val="800"/>
+              </a:spcAft>
+              <a:defRPr sz="1600" b="1">
+                <a:solidFill>
+                  <a:srgbClr val="182030"/>
+                </a:solidFill>
+                <a:latin typeface="微软雅黑"/>
+              </a:defRPr>
+            </a:pPr>
+            <a:r>
+              <a:t>跨源零样本：裂缝检出的 AP50 从 0.7283 掉到 0.0026（−99.6%）</a:t>
+            </a:r>
+          </a:p>
+          <a:p>
+            <a:pPr lvl="1">
+              <a:spcAft>
+                <a:spcPts val="400"/>
+              </a:spcAft>
+              <a:defRPr sz="1600" b="0">
+                <a:solidFill>
+                  <a:srgbClr val="182030"/>
+                </a:solidFill>
+                <a:latin typeface="微软雅黑"/>
+              </a:defRPr>
+            </a:pPr>
+            <a:r>
+              <a:t>先排除三种朴素解释：不是分辨率（1280 反而更差）、不是框语义偏差、不是模型无响应</a:t>
+            </a:r>
+          </a:p>
+          <a:p>
+            <a:pPr lvl="1">
+              <a:spcAft>
+                <a:spcPts val="400"/>
+              </a:spcAft>
+              <a:defRPr sz="1600" b="0">
+                <a:solidFill>
+                  <a:srgbClr val="182030"/>
+                </a:solidFill>
+                <a:latin typeface="微软雅黑"/>
+              </a:defRPr>
+            </a:pPr>
+            <a:r>
+              <a:t>真因是「置信度塌陷」：中位 conf 0.466 → 0.094；达阈值比例 67.0% → 4.4%</a:t>
+            </a:r>
+          </a:p>
+          <a:p>
+            <a:pPr>
+              <a:spcAft>
+                <a:spcPts val="800"/>
+              </a:spcAft>
+              <a:defRPr sz="1600" b="1">
+                <a:solidFill>
+                  <a:srgbClr val="182030"/>
+                </a:solidFill>
+                <a:latin typeface="微软雅黑"/>
+              </a:defRPr>
+            </a:pPr>
+            <a:r>
+              <a:t>★ 由此发现我们自己的一个缺口：弃权挡不住「模型在分布外失效」</a:t>
+            </a:r>
+          </a:p>
+          <a:p>
+            <a:pPr lvl="1">
+              <a:spcAft>
+                <a:spcPts val="400"/>
+              </a:spcAft>
+              <a:defRPr sz="1600" b="0">
+                <a:solidFill>
+                  <a:srgbClr val="182030"/>
+                </a:solidFill>
+                <a:latin typeface="微软雅黑"/>
+              </a:defRPr>
+            </a:pPr>
+            <a:r>
+              <a:t>几何合格 + 图像清晰时，系统仍会输出风险等级 B —— 一个结构性安全表述</a:t>
+            </a:r>
+          </a:p>
+          <a:p>
+            <a:pPr lvl="1">
+              <a:spcAft>
+                <a:spcPts val="400"/>
+              </a:spcAft>
+              <a:defRPr sz="1600" b="0">
+                <a:solidFill>
+                  <a:srgbClr val="182030"/>
+                </a:solidFill>
+                <a:latin typeface="微软雅黑"/>
+              </a:defRPr>
+            </a:pPr>
+            <a:r>
+              <a:t>⇒ 弃权是「几何 + 成像」驱动的；模型层的失效信号尚未接入（如实标为未实现）；同类的「假安全」路径另见空掩膜修复（技术报告 §11.13）</a:t>
+            </a:r>
+          </a:p>
+          <a:p>
+            <a:pPr>
+              <a:spcAft>
+                <a:spcPts val="800"/>
+              </a:spcAft>
+              <a:defRPr sz="1600" b="1">
+                <a:solidFill>
+                  <a:srgbClr val="182030"/>
+                </a:solidFill>
+                <a:latin typeface="微软雅黑"/>
+              </a:defRPr>
+            </a:pPr>
+            <a:r>
+              <a:t>另一件必须说的：一个我们做不出来的负结果</a:t>
+            </a:r>
+          </a:p>
+          <a:p>
+            <a:pPr lvl="1">
+              <a:spcAft>
+                <a:spcPts val="400"/>
+              </a:spcAft>
+              <a:defRPr sz="1600" b="0">
+                <a:solidFill>
+                  <a:srgbClr val="182030"/>
+                </a:solidFill>
+                <a:latin typeface="微软雅黑"/>
+              </a:defRPr>
+            </a:pPr>
+            <a:r>
+              <a:t>本想量化「空鼓能否从可见光恢复」，但该数据的标注本身就是在可见光上做的</a:t>
+            </a:r>
+          </a:p>
+          <a:p>
+            <a:pPr lvl="1">
+              <a:spcAft>
+                <a:spcPts val="400"/>
+              </a:spcAft>
+              <a:defRPr sz="1600" b="0">
+                <a:solidFill>
+                  <a:srgbClr val="182030"/>
+                </a:solidFill>
+                <a:latin typeface="微软雅黑"/>
+              </a:defRPr>
+            </a:pPr>
+            <a:r>
+              <a:t>⇒ 该对比对红外结构性不利，既不证实也不证伪 §9.2；如实记为负结果</a:t>
             </a:r>
           </a:p>
         </p:txBody>
@@ -9049,7 +9242,7 @@
               </a:defRPr>
             </a:pPr>
             <a:r>
-              <a:t>外部检验：把 BFDD 当作一把外部的尺子</a:t>
+              <a:t>从「判不了」到「下一步」：区间与决策</a:t>
             </a:r>
           </a:p>
         </p:txBody>
@@ -9088,7 +9281,7 @@
               </a:defRPr>
             </a:pPr>
             <a:r>
-              <a:t>数据：838 对 RGB + 红外像素级对齐（CC BY 4.0，东南大学），从未参与训练</a:t>
+              <a:t>不只给点值：测量值配上 90% 区间（conformal，按目标像素数分箱）</a:t>
             </a:r>
           </a:p>
           <a:p>
@@ -9104,7 +9297,23 @@
               </a:defRPr>
             </a:pPr>
             <a:r>
-              <a:t>用法：不训练、不改 V3 —— 只把它当外部尺子，量我们自己的边界</a:t>
+              <a:t>独立测试集覆盖率 93.5%（两箱分别 96.7% / 91.3%），目标 90%</a:t>
+            </a:r>
+          </a:p>
+          <a:p>
+            <a:pPr lvl="1">
+              <a:spcAft>
+                <a:spcPts val="400"/>
+              </a:spcAft>
+              <a:defRPr sz="1600" b="0">
+                <a:solidFill>
+                  <a:srgbClr val="182030"/>
+                </a:solidFill>
+                <a:latin typeface="微软雅黑"/>
+              </a:defRPr>
+            </a:pPr>
+            <a:r>
+              <a:t>分箱是必要的：两箱偏差方向相反（+0.33mm / −8.62mm），不分箱会被混掉</a:t>
             </a:r>
           </a:p>
           <a:p>
@@ -9120,7 +9329,7 @@
               </a:defRPr>
             </a:pPr>
             <a:r>
-              <a:t>跨源零样本：裂缝检出的 AP50 从 0.7283 掉到 0.0026（−99.6%）</a:t>
+              <a:t>「下一步」：给结论 / 建议再拍 / 建议专业鉴定 —— 期望损失最小者</a:t>
             </a:r>
           </a:p>
           <a:p>
@@ -9136,7 +9345,7 @@
               </a:defRPr>
             </a:pPr>
             <a:r>
-              <a:t>先排除三种朴素解释：不是分辨率（1280 反而更差）、不是框语义偏差、不是模型无响应</a:t>
+              <a:t>P(误差) 取自实测：接受带 29.24%，两个拒绝区 73.3% / 83.8%</a:t>
             </a:r>
           </a:p>
           <a:p>
@@ -9152,7 +9361,7 @@
               </a:defRPr>
             </a:pPr>
             <a:r>
-              <a:t>真因是「置信度塌陷」：中位 conf 0.466 → 0.094；达阈值比例 67.0% → 4.4%</a:t>
+              <a:t>不给成本定值，只给参数化边界：「在成本比 = r 时，最优行动是 X」</a:t>
             </a:r>
           </a:p>
           <a:p>
@@ -9168,7 +9377,7 @@
               </a:defRPr>
             </a:pPr>
             <a:r>
-              <a:t>★ 由此发现我们自己的一个缺口：弃权挡不住「模型在分布外失效」</a:t>
+              <a:t>★ 但区间也有它自己的边界，我们不藏</a:t>
             </a:r>
           </a:p>
           <a:p>
@@ -9184,7 +9393,7 @@
               </a:defRPr>
             </a:pPr>
             <a:r>
-              <a:t>几何合格 + 图像清晰时，系统仍会输出风险等级 B —— 一个结构性安全表述</a:t>
+              <a:t>合成域校准 ⇒ 只声称「合成域上覆盖率已验证」，不声称「真机 90% 保证」</a:t>
             </a:r>
           </a:p>
           <a:p>
@@ -9200,7 +9409,7 @@
               </a:defRPr>
             </a:pPr>
             <a:r>
-              <a:t>⇒ 弃权是「几何 + 成像」驱动的；模型层的失效信号尚未接入（如实标为未实现）</a:t>
+              <a:t>区间实测很宽（1.73mm ⇒ [0.73, 6.36]mm），界面明写「信息量低，不宜据此判定」</a:t>
             </a:r>
           </a:p>
           <a:p>
@@ -9216,7 +9425,7 @@
               </a:defRPr>
             </a:pPr>
             <a:r>
-              <a:t>另一件必须说的：一个我们做不出来的负结果</a:t>
+              <a:t>还有一个我们明确不做的方向：时间演化预测</a:t>
             </a:r>
           </a:p>
           <a:p>
@@ -9232,23 +9441,7 @@
               </a:defRPr>
             </a:pPr>
             <a:r>
-              <a:t>本想量化「空鼓能否从可见光恢复」，但该数据的标注本身就是在可见光上做的</a:t>
-            </a:r>
-          </a:p>
-          <a:p>
-            <a:pPr lvl="1">
-              <a:spcAft>
-                <a:spcPts val="400"/>
-              </a:spcAft>
-              <a:defRPr sz="1600" b="0">
-                <a:solidFill>
-                  <a:srgbClr val="182030"/>
-                </a:solidFill>
-                <a:latin typeface="微软雅黑"/>
-              </a:defRPr>
-            </a:pPr>
-            <a:r>
-              <a:t>⇒ 该对比对红外结构性不利，既不证实也不证伪 §9.2；如实记为负结果</a:t>
+              <a:t>无日期字段、图片 0 EXIF、同楼无重复巡检、投稿 0 条 ⇒ 写清边界与补足条件</a:t>
             </a:r>
           </a:p>
         </p:txBody>
@@ -9264,6 +9457,14 @@
 <file path=ppt/slides/slide23.xml><?xml version="1.0" encoding="utf-8"?>
 <p:sld xmlns:a="http://schemas.openxmlformats.org/drawingml/2006/main" xmlns:p="http://schemas.openxmlformats.org/presentationml/2006/main" xmlns:r="http://schemas.openxmlformats.org/officeDocument/2006/relationships">
   <p:cSld>
+    <p:bg>
+      <p:bgPr>
+        <a:solidFill>
+          <a:srgbClr val="2563EB"/>
+        </a:solidFill>
+        <a:effectLst/>
+      </p:bgPr>
+    </p:bg>
     <p:spTree>
       <p:nvGrpSpPr>
         <p:cNvPr id="1" name=""/>
@@ -9279,14 +9480,14 @@
         </p:nvSpPr>
         <p:spPr>
           <a:xfrm>
-            <a:off x="0" y="0"/>
-            <a:ext cx="9144000" cy="1005840"/>
+            <a:off x="0" y="5394960"/>
+            <a:ext cx="9144000" cy="1463040"/>
           </a:xfrm>
           <a:prstGeom prst="rect">
             <a:avLst/>
           </a:prstGeom>
           <a:solidFill>
-            <a:srgbClr val="2563EB"/>
+            <a:srgbClr val="0891B2"/>
           </a:solidFill>
           <a:ln>
             <a:noFill/>
@@ -9322,8 +9523,8 @@
         </p:nvSpPr>
         <p:spPr>
           <a:xfrm>
-            <a:off x="274320" y="228600"/>
-            <a:ext cx="548640" cy="548640"/>
+            <a:off x="2834640" y="1463040"/>
+            <a:ext cx="1371600" cy="63500"/>
           </a:xfrm>
           <a:prstGeom prst="rect">
             <a:avLst/>
@@ -9353,17 +9554,7 @@
           <a:bodyPr rtlCol="0" anchor="ctr"/>
           <a:lstStyle/>
           <a:p>
-            <a:pPr algn="ctr">
-              <a:defRPr sz="2000" b="1">
-                <a:solidFill>
-                  <a:srgbClr val="FFFFFF"/>
-                </a:solidFill>
-                <a:latin typeface="微软雅黑"/>
-              </a:defRPr>
-            </a:pPr>
-            <a:r>
-              <a:t>05</a:t>
-            </a:r>
+            <a:pPr algn="ctr"/>
           </a:p>
         </p:txBody>
       </p:sp>
@@ -9375,8 +9566,8 @@
         </p:nvSpPr>
         <p:spPr>
           <a:xfrm>
-            <a:off x="1097280" y="91440"/>
-            <a:ext cx="7498080" cy="822960"/>
+            <a:off x="914400" y="2011680"/>
+            <a:ext cx="7315200" cy="1188720"/>
           </a:xfrm>
           <a:prstGeom prst="rect">
             <a:avLst/>
@@ -9389,8 +9580,8 @@
           </a:bodyPr>
           <a:lstStyle/>
           <a:p>
-            <a:pPr algn="l">
-              <a:defRPr sz="2400" b="1">
+            <a:pPr algn="ctr">
+              <a:defRPr sz="4400" b="1">
                 <a:solidFill>
                   <a:srgbClr val="FFFFFF"/>
                 </a:solidFill>
@@ -9398,7 +9589,7 @@
               </a:defRPr>
             </a:pPr>
             <a:r>
-              <a:t>从「判不了」到「下一步」：区间与决策</a:t>
+              <a:t>谢谢各位评委老师</a:t>
             </a:r>
           </a:p>
         </p:txBody>
@@ -9411,8 +9602,8 @@
         </p:nvSpPr>
         <p:spPr>
           <a:xfrm>
-            <a:off x="731520" y="1234440"/>
-            <a:ext cx="7680960" cy="5029200"/>
+            <a:off x="914400" y="3383280"/>
+            <a:ext cx="7315200" cy="914400"/>
           </a:xfrm>
           <a:prstGeom prst="rect">
             <a:avLst/>
@@ -9425,179 +9616,52 @@
           </a:bodyPr>
           <a:lstStyle/>
           <a:p>
-            <a:pPr>
-              <a:spcAft>
-                <a:spcPts val="800"/>
-              </a:spcAft>
-              <a:defRPr sz="1600" b="1">
-                <a:solidFill>
-                  <a:srgbClr val="182030"/>
-                </a:solidFill>
-                <a:latin typeface="微软雅黑"/>
-              </a:defRPr>
-            </a:pPr>
-            <a:r>
-              <a:t>不只给点值：测量值配上 90% 区间（conformal，按目标像素数分箱）</a:t>
-            </a:r>
-          </a:p>
-          <a:p>
-            <a:pPr lvl="1">
-              <a:spcAft>
-                <a:spcPts val="400"/>
-              </a:spcAft>
-              <a:defRPr sz="1600" b="0">
-                <a:solidFill>
-                  <a:srgbClr val="182030"/>
-                </a:solidFill>
-                <a:latin typeface="微软雅黑"/>
-              </a:defRPr>
-            </a:pPr>
-            <a:r>
-              <a:t>独立测试集覆盖率 93.5%（两箱分别 96.7% / 91.3%），目标 90%</a:t>
-            </a:r>
-          </a:p>
-          <a:p>
-            <a:pPr lvl="1">
-              <a:spcAft>
-                <a:spcPts val="400"/>
-              </a:spcAft>
-              <a:defRPr sz="1600" b="0">
-                <a:solidFill>
-                  <a:srgbClr val="182030"/>
-                </a:solidFill>
-                <a:latin typeface="微软雅黑"/>
-              </a:defRPr>
-            </a:pPr>
-            <a:r>
-              <a:t>分箱是必要的：两箱偏差方向相反（+0.33mm / −8.62mm），不分箱会被混掉</a:t>
-            </a:r>
-          </a:p>
-          <a:p>
-            <a:pPr>
-              <a:spcAft>
-                <a:spcPts val="800"/>
-              </a:spcAft>
-              <a:defRPr sz="1600" b="1">
-                <a:solidFill>
-                  <a:srgbClr val="182030"/>
-                </a:solidFill>
-                <a:latin typeface="微软雅黑"/>
-              </a:defRPr>
-            </a:pPr>
-            <a:r>
-              <a:t>「下一步」：给结论 / 建议再拍 / 建议专业鉴定 —— 期望损失最小者</a:t>
-            </a:r>
-          </a:p>
-          <a:p>
-            <a:pPr lvl="1">
-              <a:spcAft>
-                <a:spcPts val="400"/>
-              </a:spcAft>
-              <a:defRPr sz="1600" b="0">
-                <a:solidFill>
-                  <a:srgbClr val="182030"/>
-                </a:solidFill>
-                <a:latin typeface="微软雅黑"/>
-              </a:defRPr>
-            </a:pPr>
-            <a:r>
-              <a:t>P(误差) 取自实测：接受带 29.24%，两个拒绝区 73.3% / 83.8%</a:t>
-            </a:r>
-          </a:p>
-          <a:p>
-            <a:pPr lvl="1">
-              <a:spcAft>
-                <a:spcPts val="400"/>
-              </a:spcAft>
-              <a:defRPr sz="1600" b="0">
-                <a:solidFill>
-                  <a:srgbClr val="182030"/>
-                </a:solidFill>
-                <a:latin typeface="微软雅黑"/>
-              </a:defRPr>
-            </a:pPr>
-            <a:r>
-              <a:t>不给成本定值，只给参数化边界：「在成本比 = r 时，最优行动是 X」</a:t>
-            </a:r>
-          </a:p>
-          <a:p>
-            <a:pPr>
-              <a:spcAft>
-                <a:spcPts val="800"/>
-              </a:spcAft>
-              <a:defRPr sz="1600" b="1">
-                <a:solidFill>
-                  <a:srgbClr val="182030"/>
-                </a:solidFill>
-                <a:latin typeface="微软雅黑"/>
-              </a:defRPr>
-            </a:pPr>
-            <a:r>
-              <a:t>★ 但区间也有它自己的边界，我们不藏</a:t>
-            </a:r>
-          </a:p>
-          <a:p>
-            <a:pPr lvl="1">
-              <a:spcAft>
-                <a:spcPts val="400"/>
-              </a:spcAft>
-              <a:defRPr sz="1600" b="0">
-                <a:solidFill>
-                  <a:srgbClr val="182030"/>
-                </a:solidFill>
-                <a:latin typeface="微软雅黑"/>
-              </a:defRPr>
-            </a:pPr>
-            <a:r>
-              <a:t>合成域校准 ⇒ 只声称「合成域上覆盖率已验证」，不声称「真机 90% 保证」</a:t>
-            </a:r>
-          </a:p>
-          <a:p>
-            <a:pPr lvl="1">
-              <a:spcAft>
-                <a:spcPts val="400"/>
-              </a:spcAft>
-              <a:defRPr sz="1600" b="0">
-                <a:solidFill>
-                  <a:srgbClr val="182030"/>
-                </a:solidFill>
-                <a:latin typeface="微软雅黑"/>
-              </a:defRPr>
-            </a:pPr>
-            <a:r>
-              <a:t>区间实测很宽（1.73mm ⇒ [0.73, 6.36]mm），界面明写「信息量低，不宜据此判定」</a:t>
-            </a:r>
-          </a:p>
-          <a:p>
-            <a:pPr>
-              <a:spcAft>
-                <a:spcPts val="800"/>
-              </a:spcAft>
-              <a:defRPr sz="1600" b="1">
-                <a:solidFill>
-                  <a:srgbClr val="182030"/>
-                </a:solidFill>
-                <a:latin typeface="微软雅黑"/>
-              </a:defRPr>
-            </a:pPr>
-            <a:r>
-              <a:t>还有一个我们明确不做的方向：时间演化预测</a:t>
-            </a:r>
-          </a:p>
-          <a:p>
-            <a:pPr lvl="1">
-              <a:spcAft>
-                <a:spcPts val="400"/>
-              </a:spcAft>
-              <a:defRPr sz="1600" b="0">
-                <a:solidFill>
-                  <a:srgbClr val="182030"/>
-                </a:solidFill>
-                <a:latin typeface="微软雅黑"/>
-              </a:defRPr>
-            </a:pPr>
-            <a:r>
-              <a:t>无日期字段、图片 0 EXIF、同楼无重复巡检、投稿 0 条 ⇒ 写清边界与补足条件</a:t>
+            <a:pPr algn="ctr">
+              <a:defRPr sz="2000">
+                <a:solidFill>
+                  <a:srgbClr val="DEE7FC"/>
+                </a:solidFill>
+                <a:latin typeface="微软雅黑"/>
+              </a:defRPr>
+            </a:pPr>
+            <a:r>
+              <a:t>一个知道自己什么时候不该给结论的筛查系统</a:t>
+            </a:r>
+          </a:p>
+        </p:txBody>
+      </p:sp>
+      <p:sp>
+        <p:nvSpPr>
+          <p:cNvPr id="6" name="TextBox 5"/>
+          <p:cNvSpPr txBox="1"/>
+          <p:nvPr/>
+        </p:nvSpPr>
+        <p:spPr>
+          <a:xfrm>
+            <a:off x="914400" y="5806440"/>
+            <a:ext cx="7315200" cy="640080"/>
+          </a:xfrm>
+          <a:prstGeom prst="rect">
+            <a:avLst/>
+          </a:prstGeom>
+          <a:noFill/>
+        </p:spPr>
+        <p:txBody>
+          <a:bodyPr wrap="square">
+            <a:spAutoFit/>
+          </a:bodyPr>
+          <a:lstStyle/>
+          <a:p>
+            <a:pPr algn="ctr">
+              <a:defRPr sz="1400">
+                <a:solidFill>
+                  <a:srgbClr val="FFFFFF"/>
+                </a:solidFill>
+                <a:latin typeface="微软雅黑"/>
+              </a:defRPr>
+            </a:pPr>
+            <a:r>
+              <a:t>北京建筑大学 · 第六届萌新种子杯视觉赛道创新题</a:t>
             </a:r>
           </a:p>
         </p:txBody>
